--- a/Lesson_06/Занятие_06_Презентация.pptx
+++ b/Lesson_06/Занятие_06_Презентация.pptx
@@ -2546,7 +2546,7 @@
         <p:spPr>
           <a:xfrm>
             <a:off x="274320" y="932688"/>
-            <a:ext cx="8595360" cy="1417320"/>
+            <a:ext cx="8595360" cy="1554480"/>
           </a:xfrm>
           <a:prstGeom prst="rect">
             <a:avLst/>
@@ -2595,7 +2595,7 @@
         </p:nvSpPr>
         <p:spPr>
           <a:xfrm>
-            <a:off x="393192" y="996696"/>
+            <a:off x="393192" y="956236"/>
             <a:ext cx="8412480" cy="1289304"/>
           </a:xfrm>
           <a:prstGeom prst="rect">
@@ -2612,7 +2612,7 @@
               <a:buNone/>
             </a:pPr>
             <a:r>
-              <a:rPr lang="en-US" sz="1400" dirty="0">
+              <a:rPr lang="en-US" sz="1200" dirty="0">
                 <a:solidFill>
                   <a:srgbClr val="1E0A3C"/>
                 </a:solidFill>
@@ -2622,14 +2622,14 @@
               </a:rPr>
               <a:t># Шаг 1: загружаем объект из базы в сессию</a:t>
             </a:r>
-            <a:endParaRPr lang="en-US" sz="1400" dirty="0"/>
-          </a:p>
-          <a:p>
-            <a:pPr marL="0" indent="0">
-              <a:buNone/>
-            </a:pPr>
-            <a:r>
-              <a:rPr lang="en-US" sz="1400" dirty="0">
+            <a:endParaRPr lang="en-US" sz="1200" dirty="0"/>
+          </a:p>
+          <a:p>
+            <a:pPr marL="0" indent="0">
+              <a:buNone/>
+            </a:pPr>
+            <a:r>
+              <a:rPr lang="en-US" sz="1200" dirty="0">
                 <a:solidFill>
                   <a:srgbClr val="1E0A3C"/>
                 </a:solidFill>
@@ -2639,14 +2639,14 @@
               </a:rPr>
               <a:t>athlete = db.query(Athlete).filter(</a:t>
             </a:r>
-            <a:endParaRPr lang="en-US" sz="1400" dirty="0"/>
-          </a:p>
-          <a:p>
-            <a:pPr marL="0" indent="0">
-              <a:buNone/>
-            </a:pPr>
-            <a:r>
-              <a:rPr lang="en-US" sz="1400" dirty="0">
+            <a:endParaRPr lang="en-US" sz="1200" dirty="0"/>
+          </a:p>
+          <a:p>
+            <a:pPr marL="0" indent="0">
+              <a:buNone/>
+            </a:pPr>
+            <a:r>
+              <a:rPr lang="en-US" sz="1200" dirty="0">
                 <a:solidFill>
                   <a:srgbClr val="1E0A3C"/>
                 </a:solidFill>
@@ -2656,14 +2656,14 @@
               </a:rPr>
               <a:t>    Athlete.id == athlete_id).first()</a:t>
             </a:r>
-            <a:endParaRPr lang="en-US" sz="1400" dirty="0"/>
-          </a:p>
-          <a:p>
-            <a:pPr marL="0" indent="0">
-              <a:buNone/>
-            </a:pPr>
-            <a:r>
-              <a:rPr lang="en-US" sz="1400" dirty="0">
+            <a:endParaRPr lang="en-US" sz="1200" dirty="0"/>
+          </a:p>
+          <a:p>
+            <a:pPr marL="0" indent="0">
+              <a:buNone/>
+            </a:pPr>
+            <a:r>
+              <a:rPr lang="en-US" sz="1200" dirty="0">
                 <a:solidFill>
                   <a:srgbClr val="1E0A3C"/>
                 </a:solidFill>
@@ -2673,14 +2673,14 @@
               </a:rPr>
               <a:t># Шаг 2: меняем атрибуты — SQL ещё НЕ выполняется</a:t>
             </a:r>
-            <a:endParaRPr lang="en-US" sz="1400" dirty="0"/>
-          </a:p>
-          <a:p>
-            <a:pPr marL="0" indent="0">
-              <a:buNone/>
-            </a:pPr>
-            <a:r>
-              <a:rPr lang="en-US" sz="1400" dirty="0">
+            <a:endParaRPr lang="en-US" sz="1200" dirty="0"/>
+          </a:p>
+          <a:p>
+            <a:pPr marL="0" indent="0">
+              <a:buNone/>
+            </a:pPr>
+            <a:r>
+              <a:rPr lang="en-US" sz="1200" dirty="0">
                 <a:solidFill>
                   <a:srgbClr val="1E0A3C"/>
                 </a:solidFill>
@@ -2690,14 +2690,14 @@
               </a:rPr>
               <a:t>athlete.name = name</a:t>
             </a:r>
-            <a:endParaRPr lang="en-US" sz="1400" dirty="0"/>
-          </a:p>
-          <a:p>
-            <a:pPr marL="0" indent="0">
-              <a:buNone/>
-            </a:pPr>
-            <a:r>
-              <a:rPr lang="en-US" sz="1400" dirty="0">
+            <a:endParaRPr lang="en-US" sz="1200" dirty="0"/>
+          </a:p>
+          <a:p>
+            <a:pPr marL="0" indent="0">
+              <a:buNone/>
+            </a:pPr>
+            <a:r>
+              <a:rPr lang="en-US" sz="1200" dirty="0">
                 <a:solidFill>
                   <a:srgbClr val="1E0A3C"/>
                 </a:solidFill>
@@ -2707,14 +2707,14 @@
               </a:rPr>
               <a:t>athlete.sport = sport  # ... остальные поля</a:t>
             </a:r>
-            <a:endParaRPr lang="en-US" sz="1400" dirty="0"/>
-          </a:p>
-          <a:p>
-            <a:pPr marL="0" indent="0">
-              <a:buNone/>
-            </a:pPr>
-            <a:r>
-              <a:rPr lang="en-US" sz="1400" dirty="0">
+            <a:endParaRPr lang="en-US" sz="1200" dirty="0"/>
+          </a:p>
+          <a:p>
+            <a:pPr marL="0" indent="0">
+              <a:buNone/>
+            </a:pPr>
+            <a:r>
+              <a:rPr lang="en-US" sz="1200" dirty="0">
                 <a:solidFill>
                   <a:srgbClr val="1E0A3C"/>
                 </a:solidFill>
@@ -2724,14 +2724,14 @@
               </a:rPr>
               <a:t># Шаг 3: фиксируем — SQLAlchemy видит изменения и генерирует UPDATE</a:t>
             </a:r>
-            <a:endParaRPr lang="en-US" sz="1400" dirty="0"/>
-          </a:p>
-          <a:p>
-            <a:pPr marL="0" indent="0">
-              <a:buNone/>
-            </a:pPr>
-            <a:r>
-              <a:rPr lang="en-US" sz="1400" dirty="0">
+            <a:endParaRPr lang="en-US" sz="1200" dirty="0"/>
+          </a:p>
+          <a:p>
+            <a:pPr marL="0" indent="0">
+              <a:buNone/>
+            </a:pPr>
+            <a:r>
+              <a:rPr lang="en-US" sz="1200" dirty="0">
                 <a:solidFill>
                   <a:srgbClr val="1E0A3C"/>
                 </a:solidFill>
@@ -2741,7 +2741,7 @@
               </a:rPr>
               <a:t>db.commit()  # UPDATE athletes SET name=:name ... WHERE id=:id</a:t>
             </a:r>
-            <a:endParaRPr lang="en-US" sz="1400" dirty="0"/>
+            <a:endParaRPr lang="en-US" sz="1200" dirty="0"/>
           </a:p>
         </p:txBody>
       </p:sp>
